--- a/presentation.pptx
+++ b/presentation.pptx
@@ -16,6 +16,8 @@
     <p:sldId id="264" r:id="rId10"/>
     <p:sldId id="265" r:id="rId11"/>
     <p:sldId id="266" r:id="rId12"/>
+    <p:sldId id="267" r:id="rId13"/>
+    <p:sldId id="268" r:id="rId14"/>
   </p:sldIdLst>
   <p:sldSz cx="9144000" cy="5143500" type="screen16x9"/>
   <p:notesSz cx="6858000" cy="9144000"/>
@@ -3125,7 +3127,37 @@
             </a:pPr>
             <a:r>
               <a:rPr/>
-              <a:t>Very Savagely Presented Plots</a:t>
+              <a:t>EDA Results So far</a:t>
+            </a:r>
+          </a:p>
+        </p:txBody>
+      </p:sp>
+      <p:sp>
+        <p:nvSpPr>
+          <p:cNvPr id="3" name="Subtitle 2"/>
+          <p:cNvSpPr>
+            <a:spLocks noGrp="1"/>
+          </p:cNvSpPr>
+          <p:nvPr>
+            <p:ph idx="1" type="subTitle"/>
+          </p:nvPr>
+        </p:nvSpPr>
+        <p:spPr>
+          <a:xfrm>
+            <a:off x="1371600" y="2914650"/>
+            <a:ext cx="6400800" cy="1314450"/>
+          </a:xfrm>
+        </p:spPr>
+        <p:txBody>
+          <a:bodyPr/>
+          <a:lstStyle/>
+          <a:p>
+            <a:pPr lvl="0" indent="0" marL="0">
+              <a:buNone/>
+            </a:pPr>
+            <a:r>
+              <a:rPr/>
+              <a:t>(Ben’s) Powerpoint idea so good</a:t>
             </a:r>
           </a:p>
         </p:txBody>
@@ -3136,6 +3168,135 @@
 </file>
 
 <file path=ppt/slides/slide10.xml><?xml version="1.0" encoding="utf-8"?>
+<p:sld xmlns:a="http://schemas.openxmlformats.org/drawingml/2006/main" xmlns:r="http://schemas.openxmlformats.org/officeDocument/2006/relationships" xmlns:p="http://schemas.openxmlformats.org/presentationml/2006/main">
+  <p:cSld>
+    <p:spTree>
+      <p:nvGrpSpPr>
+        <p:cNvPr id="1" name=""/>
+        <p:cNvGrpSpPr/>
+        <p:nvPr/>
+      </p:nvGrpSpPr>
+      <p:grpSpPr>
+        <a:xfrm>
+          <a:off x="0" y="0"/>
+          <a:ext cx="0" cy="0"/>
+          <a:chOff x="0" y="0"/>
+          <a:chExt cx="0" cy="0"/>
+        </a:xfrm>
+      </p:grpSpPr>
+      <p:sp>
+        <p:nvSpPr>
+          <p:cNvPr id="4" name="Text Placeholder 3"/>
+          <p:cNvSpPr>
+            <a:spLocks noGrp="1"/>
+          </p:cNvSpPr>
+          <p:nvPr>
+            <p:ph idx="2" sz="half" type="body"/>
+          </p:nvPr>
+        </p:nvSpPr>
+        <p:spPr/>
+        <p:txBody>
+          <a:bodyPr/>
+          <a:lstStyle/>
+          <a:p>
+            <a:pPr lvl="0" indent="0" marL="0">
+              <a:buNone/>
+            </a:pPr>
+            <a:r>
+              <a:rPr baseline="-25000"/>
+              <a:t>Nice and tight yellow-orange cluster of share of those neither of european or british descent between 15-20 percent includes both gentrifying and non gentrifying areas. Descent doesn’t seem to have a strong relationship with gentrification in the same way that same %Grads does</a:t>
+            </a:r>
+          </a:p>
+        </p:txBody>
+      </p:sp>
+      <p:pic>
+        <p:nvPicPr>
+          <p:cNvPr descr="presentation_files/figure-pptx/unnamed-chunk-7-1.png" id="0" name="Picture 1"/>
+          <p:cNvPicPr>
+            <a:picLocks noGrp="1" noChangeAspect="1"/>
+          </p:cNvPicPr>
+          <p:nvPr/>
+        </p:nvPicPr>
+        <p:blipFill>
+          <a:blip r:embed="rId2"/>
+          <a:stretch>
+            <a:fillRect/>
+          </a:stretch>
+        </p:blipFill>
+        <p:spPr bwMode="auto">
+          <a:xfrm>
+            <a:off x="3568700" y="977900"/>
+            <a:ext cx="5105400" cy="2832100"/>
+          </a:xfrm>
+          <a:prstGeom prst="rect">
+            <a:avLst/>
+          </a:prstGeom>
+          <a:noFill/>
+          <a:ln w="9525">
+            <a:noFill/>
+            <a:headEnd/>
+            <a:tailEnd/>
+          </a:ln>
+        </p:spPr>
+      </p:pic>
+    </p:spTree>
+  </p:cSld>
+</p:sld>
+</file>
+
+<file path=ppt/slides/slide11.xml><?xml version="1.0" encoding="utf-8"?>
+<p:sld xmlns:a="http://schemas.openxmlformats.org/drawingml/2006/main" xmlns:r="http://schemas.openxmlformats.org/officeDocument/2006/relationships" xmlns:p="http://schemas.openxmlformats.org/presentationml/2006/main">
+  <p:cSld>
+    <p:spTree>
+      <p:nvGrpSpPr>
+        <p:cNvPr id="1" name=""/>
+        <p:cNvGrpSpPr/>
+        <p:nvPr/>
+      </p:nvGrpSpPr>
+      <p:grpSpPr>
+        <a:xfrm>
+          <a:off x="0" y="0"/>
+          <a:ext cx="0" cy="0"/>
+          <a:chOff x="0" y="0"/>
+          <a:chExt cx="0" cy="0"/>
+        </a:xfrm>
+      </p:grpSpPr>
+      <p:pic>
+        <p:nvPicPr>
+          <p:cNvPr descr="presentation_files/figure-pptx/unnamed-chunk-8-1.png" id="0" name="Picture 1"/>
+          <p:cNvPicPr>
+            <a:picLocks noGrp="1" noChangeAspect="1"/>
+          </p:cNvPicPr>
+          <p:nvPr/>
+        </p:nvPicPr>
+        <p:blipFill>
+          <a:blip r:embed="rId2"/>
+          <a:stretch>
+            <a:fillRect/>
+          </a:stretch>
+        </p:blipFill>
+        <p:spPr bwMode="auto">
+          <a:xfrm>
+            <a:off x="1524000" y="1193800"/>
+            <a:ext cx="6108700" cy="3390900"/>
+          </a:xfrm>
+          <a:prstGeom prst="rect">
+            <a:avLst/>
+          </a:prstGeom>
+          <a:noFill/>
+          <a:ln w="9525">
+            <a:noFill/>
+            <a:headEnd/>
+            <a:tailEnd/>
+          </a:ln>
+        </p:spPr>
+      </p:pic>
+    </p:spTree>
+  </p:cSld>
+</p:sld>
+</file>
+
+<file path=ppt/slides/slide12.xml><?xml version="1.0" encoding="utf-8"?>
 <p:sld xmlns:a="http://schemas.openxmlformats.org/drawingml/2006/main" xmlns:r="http://schemas.openxmlformats.org/officeDocument/2006/relationships" xmlns:p="http://schemas.openxmlformats.org/presentationml/2006/main">
   <p:cSld>
     <p:spTree>
@@ -3187,7 +3348,7 @@
 </p:sld>
 </file>
 
-<file path=ppt/slides/slide11.xml><?xml version="1.0" encoding="utf-8"?>
+<file path=ppt/slides/slide13.xml><?xml version="1.0" encoding="utf-8"?>
 <p:sld xmlns:a="http://schemas.openxmlformats.org/drawingml/2006/main" xmlns:r="http://schemas.openxmlformats.org/officeDocument/2006/relationships" xmlns:p="http://schemas.openxmlformats.org/presentationml/2006/main">
   <p:cSld>
     <p:spTree>
@@ -3258,12 +3419,12 @@
       </p:grpSpPr>
       <p:sp>
         <p:nvSpPr>
-          <p:cNvPr id="4" name="Text Placeholder 3"/>
-          <p:cNvSpPr>
-            <a:spLocks noGrp="1"/>
-          </p:cNvSpPr>
-          <p:nvPr>
-            <p:ph idx="2" sz="half" type="body"/>
+          <p:cNvPr id="2" name="Title 1"/>
+          <p:cNvSpPr>
+            <a:spLocks noGrp="1"/>
+          </p:cNvSpPr>
+          <p:nvPr>
+            <p:ph type="title"/>
           </p:nvPr>
         </p:nvSpPr>
         <p:spPr/>
@@ -3276,50 +3437,46 @@
             </a:pPr>
             <a:r>
               <a:rPr/>
-              <a:t>#Part 1 Univariate Visuals</a:t>
-            </a:r>
-          </a:p>
+              <a:t>Definition</a:t>
+            </a:r>
+          </a:p>
+        </p:txBody>
+      </p:sp>
+      <p:sp>
+        <p:nvSpPr>
+          <p:cNvPr id="3" name="Content Placeholder 2"/>
+          <p:cNvSpPr>
+            <a:spLocks noGrp="1"/>
+          </p:cNvSpPr>
+          <p:nvPr>
+            <p:ph idx="1"/>
+          </p:nvPr>
+        </p:nvSpPr>
+        <p:spPr/>
+        <p:txBody>
+          <a:bodyPr/>
+          <a:lstStyle/>
           <a:p>
             <a:pPr lvl="0" indent="0" marL="0">
               <a:buNone/>
             </a:pPr>
             <a:r>
               <a:rPr/>
-              <a:t>Labour Market Makeup and Gentrification</a:t>
-            </a:r>
-          </a:p>
-        </p:txBody>
-      </p:sp>
-      <p:pic>
-        <p:nvPicPr>
-          <p:cNvPr descr="presentation_files/figure-pptx/unnamed-chunk-1-1.png" id="0" name="Picture 1"/>
-          <p:cNvPicPr>
-            <a:picLocks noGrp="1" noChangeAspect="1"/>
-          </p:cNvPicPr>
-          <p:nvPr/>
-        </p:nvPicPr>
-        <p:blipFill>
-          <a:blip r:embed="rId2"/>
-          <a:stretch>
-            <a:fillRect/>
-          </a:stretch>
-        </p:blipFill>
-        <p:spPr bwMode="auto">
-          <a:xfrm>
-            <a:off x="3568700" y="1117600"/>
-            <a:ext cx="5105400" cy="2552700"/>
-          </a:xfrm>
-          <a:prstGeom prst="rect">
-            <a:avLst/>
-          </a:prstGeom>
-          <a:noFill/>
-          <a:ln w="9525">
-            <a:noFill/>
-            <a:headEnd/>
-            <a:tailEnd/>
-          </a:ln>
-        </p:spPr>
-      </p:pic>
+              <a:t>“Gentrification is a process whereby the urban working class and poor are expelled from their districts and replaced by more affluent residents. Its drivers are structural — the policies and planning frameworks of the local state, and the tendency of capital to close rent gaps. It is, as the geographer Neil Smith put it, a “global urban strategy”.</a:t>
+            </a:r>
+            <a:r>
+              <a:rPr>
+                <a:hlinkClick r:id="rId2"/>
+              </a:rPr>
+              <a:t>[10]</a:t>
+            </a:r>
+            <a:r>
+              <a:rPr/>
+              <a:t> To live in a neighbourhood being gentrified is to experience rent rises, the destruction of community and ultimately displacement. Yet it is often something that is difficult to quantify and track.”The Greater Manchester Gentrification Index (Common Wealth)</a:t>
+            </a:r>
+          </a:p>
+        </p:txBody>
+      </p:sp>
     </p:spTree>
   </p:cSld>
 </p:sld>
@@ -3344,15 +3501,149 @@
       </p:grpSpPr>
       <p:sp>
         <p:nvSpPr>
-          <p:cNvPr id="4" name="Text Placeholder 3"/>
-          <p:cNvSpPr>
-            <a:spLocks noGrp="1"/>
-          </p:cNvSpPr>
-          <p:nvPr>
-            <p:ph idx="2" sz="half" type="body"/>
-          </p:nvPr>
-        </p:nvSpPr>
-        <p:spPr/>
+          <p:cNvPr id="2" name="Title 1"/>
+          <p:cNvSpPr>
+            <a:spLocks noGrp="1"/>
+          </p:cNvSpPr>
+          <p:nvPr>
+            <p:ph type="title"/>
+          </p:nvPr>
+        </p:nvSpPr>
+        <p:spPr>
+          <a:xfrm>
+            <a:off x="722313" y="3305176"/>
+            <a:ext cx="7772400" cy="1021556"/>
+          </a:xfrm>
+        </p:spPr>
+        <p:txBody>
+          <a:bodyPr/>
+          <a:lstStyle/>
+          <a:p>
+            <a:pPr lvl="0" indent="0" marL="0">
+              <a:buNone/>
+            </a:pPr>
+            <a:r>
+              <a:rPr/>
+              <a:t>Part 1 Univariate Visuals</a:t>
+            </a:r>
+          </a:p>
+        </p:txBody>
+      </p:sp>
+    </p:spTree>
+  </p:cSld>
+</p:sld>
+</file>
+
+<file path=ppt/slides/slide4.xml><?xml version="1.0" encoding="utf-8"?>
+<p:sld xmlns:a="http://schemas.openxmlformats.org/drawingml/2006/main" xmlns:r="http://schemas.openxmlformats.org/officeDocument/2006/relationships" xmlns:p="http://schemas.openxmlformats.org/presentationml/2006/main">
+  <p:cSld>
+    <p:spTree>
+      <p:nvGrpSpPr>
+        <p:cNvPr id="1" name=""/>
+        <p:cNvGrpSpPr/>
+        <p:nvPr/>
+      </p:nvGrpSpPr>
+      <p:grpSpPr>
+        <a:xfrm>
+          <a:off x="0" y="0"/>
+          <a:ext cx="0" cy="0"/>
+          <a:chOff x="0" y="0"/>
+          <a:chExt cx="0" cy="0"/>
+        </a:xfrm>
+      </p:grpSpPr>
+      <p:sp>
+        <p:nvSpPr>
+          <p:cNvPr id="2" name="Title 1"/>
+          <p:cNvSpPr>
+            <a:spLocks noGrp="1"/>
+          </p:cNvSpPr>
+          <p:nvPr>
+            <p:ph type="title"/>
+          </p:nvPr>
+        </p:nvSpPr>
+        <p:spPr/>
+        <p:txBody>
+          <a:bodyPr/>
+          <a:lstStyle/>
+          <a:p>
+            <a:pPr lvl="0" indent="0" marL="0">
+              <a:buNone/>
+            </a:pPr>
+            <a:r>
+              <a:rPr/>
+              <a:t>Labour Market Makeup and Gentrification</a:t>
+            </a:r>
+          </a:p>
+        </p:txBody>
+      </p:sp>
+      <p:pic>
+        <p:nvPicPr>
+          <p:cNvPr descr="presentation_files/figure-pptx/unnamed-chunk-1-1.png" id="0" name="Picture 1"/>
+          <p:cNvPicPr>
+            <a:picLocks noGrp="1" noChangeAspect="1"/>
+          </p:cNvPicPr>
+          <p:nvPr/>
+        </p:nvPicPr>
+        <p:blipFill>
+          <a:blip r:embed="rId2"/>
+          <a:stretch>
+            <a:fillRect/>
+          </a:stretch>
+        </p:blipFill>
+        <p:spPr bwMode="auto">
+          <a:xfrm>
+            <a:off x="1181100" y="1193800"/>
+            <a:ext cx="6781800" cy="3390900"/>
+          </a:xfrm>
+          <a:prstGeom prst="rect">
+            <a:avLst/>
+          </a:prstGeom>
+          <a:noFill/>
+          <a:ln w="9525">
+            <a:noFill/>
+            <a:headEnd/>
+            <a:tailEnd/>
+          </a:ln>
+        </p:spPr>
+      </p:pic>
+    </p:spTree>
+  </p:cSld>
+</p:sld>
+</file>
+
+<file path=ppt/slides/slide5.xml><?xml version="1.0" encoding="utf-8"?>
+<p:sld xmlns:a="http://schemas.openxmlformats.org/drawingml/2006/main" xmlns:r="http://schemas.openxmlformats.org/officeDocument/2006/relationships" xmlns:p="http://schemas.openxmlformats.org/presentationml/2006/main">
+  <p:cSld>
+    <p:spTree>
+      <p:nvGrpSpPr>
+        <p:cNvPr id="1" name=""/>
+        <p:cNvGrpSpPr/>
+        <p:nvPr/>
+      </p:nvGrpSpPr>
+      <p:grpSpPr>
+        <a:xfrm>
+          <a:off x="0" y="0"/>
+          <a:ext cx="0" cy="0"/>
+          <a:chOff x="0" y="0"/>
+          <a:chExt cx="0" cy="0"/>
+        </a:xfrm>
+      </p:grpSpPr>
+      <p:sp>
+        <p:nvSpPr>
+          <p:cNvPr id="2" name="Title 1"/>
+          <p:cNvSpPr>
+            <a:spLocks noGrp="1"/>
+          </p:cNvSpPr>
+          <p:nvPr>
+            <p:ph type="title"/>
+          </p:nvPr>
+        </p:nvSpPr>
+        <p:spPr>
+          <a:xfrm>
+            <a:off x="457201" y="204787"/>
+            <a:ext cx="3008313" cy="871538"/>
+          </a:xfrm>
+        </p:spPr>
         <p:txBody>
           <a:bodyPr/>
           <a:lstStyle/>
@@ -3363,6 +3654,40 @@
             <a:r>
               <a:rPr/>
               <a:t>Housing Market Makeup and Gentrification</a:t>
+            </a:r>
+          </a:p>
+        </p:txBody>
+      </p:sp>
+      <p:sp>
+        <p:nvSpPr>
+          <p:cNvPr id="4" name="Text Placeholder 3"/>
+          <p:cNvSpPr>
+            <a:spLocks noGrp="1"/>
+          </p:cNvSpPr>
+          <p:nvPr>
+            <p:ph idx="2" sz="half" type="body"/>
+          </p:nvPr>
+        </p:nvSpPr>
+        <p:spPr/>
+        <p:txBody>
+          <a:bodyPr/>
+          <a:lstStyle/>
+          <a:p>
+            <a:pPr lvl="0" indent="0" marL="0">
+              <a:buNone/>
+            </a:pPr>
+            <a:r>
+              <a:rPr baseline="-25000"/>
+              <a:t>Comparatively larger increase in grads in gentrifying areas with divergence starting around 1991 census wave.following right to buy owner occupied tenure rises in gentrified areas between 1980-2000 but then drops and flatlines. Very low effect on non gentrified areas though.Following the peak in owner occupied tenure rented and other tenures in ancoats and quays massively overtake those in neighbors around 2000 proportional to the initial Right to Buy effect.</a:t>
+            </a:r>
+          </a:p>
+          <a:p>
+            <a:pPr lvl="0" indent="0" marL="0">
+              <a:buNone/>
+            </a:pPr>
+            <a:r>
+              <a:rPr/>
+              <a:t>Could be granger causal? Right to Buy -&gt; Lag-2Coucnil_tenure- -&gt; Lag-1Owner_tenure(+) -&gt;Renting Boom</a:t>
             </a:r>
           </a:p>
         </p:txBody>
@@ -3402,7 +3727,7 @@
 </p:sld>
 </file>
 
-<file path=ppt/slides/slide4.xml><?xml version="1.0" encoding="utf-8"?>
+<file path=ppt/slides/slide6.xml><?xml version="1.0" encoding="utf-8"?>
 <p:sld xmlns:a="http://schemas.openxmlformats.org/drawingml/2006/main" xmlns:r="http://schemas.openxmlformats.org/officeDocument/2006/relationships" xmlns:p="http://schemas.openxmlformats.org/presentationml/2006/main">
   <p:cSld>
     <p:spTree>
@@ -3421,15 +3746,20 @@
       </p:grpSpPr>
       <p:sp>
         <p:nvSpPr>
-          <p:cNvPr id="4" name="Text Placeholder 3"/>
-          <p:cNvSpPr>
-            <a:spLocks noGrp="1"/>
-          </p:cNvSpPr>
-          <p:nvPr>
-            <p:ph idx="2" sz="half" type="body"/>
-          </p:nvPr>
-        </p:nvSpPr>
-        <p:spPr/>
+          <p:cNvPr id="2" name="Title 1"/>
+          <p:cNvSpPr>
+            <a:spLocks noGrp="1"/>
+          </p:cNvSpPr>
+          <p:nvPr>
+            <p:ph type="title"/>
+          </p:nvPr>
+        </p:nvSpPr>
+        <p:spPr>
+          <a:xfrm>
+            <a:off x="457201" y="204787"/>
+            <a:ext cx="3008313" cy="871538"/>
+          </a:xfrm>
+        </p:spPr>
         <p:txBody>
           <a:bodyPr/>
           <a:lstStyle/>
@@ -3440,6 +3770,31 @@
             <a:r>
               <a:rPr/>
               <a:t>Country of Birth and Gentrification</a:t>
+            </a:r>
+          </a:p>
+        </p:txBody>
+      </p:sp>
+      <p:sp>
+        <p:nvSpPr>
+          <p:cNvPr id="4" name="Text Placeholder 3"/>
+          <p:cNvSpPr>
+            <a:spLocks noGrp="1"/>
+          </p:cNvSpPr>
+          <p:nvPr>
+            <p:ph idx="2" sz="half" type="body"/>
+          </p:nvPr>
+        </p:nvSpPr>
+        <p:spPr/>
+        <p:txBody>
+          <a:bodyPr/>
+          <a:lstStyle/>
+          <a:p>
+            <a:pPr lvl="0" indent="0" marL="0">
+              <a:buNone/>
+            </a:pPr>
+            <a:r>
+              <a:rPr baseline="-25000"/>
+              <a:t>Housing Makeup and share of those born in UK don’t seem to be that strongly associated with both groups experiencing similiar migration patterns with a notable exception of Europeans with notably parallel trends</a:t>
             </a:r>
           </a:p>
         </p:txBody>
@@ -3479,7 +3834,7 @@
 </p:sld>
 </file>
 
-<file path=ppt/slides/slide5.xml><?xml version="1.0" encoding="utf-8"?>
+<file path=ppt/slides/slide7.xml><?xml version="1.0" encoding="utf-8"?>
 <p:sld xmlns:a="http://schemas.openxmlformats.org/drawingml/2006/main" xmlns:r="http://schemas.openxmlformats.org/officeDocument/2006/relationships" xmlns:p="http://schemas.openxmlformats.org/presentationml/2006/main">
   <p:cSld>
     <p:spTree>
@@ -3498,6 +3853,36 @@
       </p:grpSpPr>
       <p:sp>
         <p:nvSpPr>
+          <p:cNvPr id="2" name="Title 1"/>
+          <p:cNvSpPr>
+            <a:spLocks noGrp="1"/>
+          </p:cNvSpPr>
+          <p:nvPr>
+            <p:ph type="title"/>
+          </p:nvPr>
+        </p:nvSpPr>
+        <p:spPr>
+          <a:xfrm>
+            <a:off x="457201" y="204787"/>
+            <a:ext cx="3008313" cy="871538"/>
+          </a:xfrm>
+        </p:spPr>
+        <p:txBody>
+          <a:bodyPr/>
+          <a:lstStyle/>
+          <a:p>
+            <a:pPr lvl="0" indent="0" marL="0">
+              <a:buNone/>
+            </a:pPr>
+            <a:r>
+              <a:rPr/>
+              <a:t>Part 2 Multivariate Visuals with Ball Mapper</a:t>
+            </a:r>
+          </a:p>
+        </p:txBody>
+      </p:sp>
+      <p:sp>
+        <p:nvSpPr>
           <p:cNvPr id="4" name="Text Placeholder 3"/>
           <p:cNvSpPr>
             <a:spLocks noGrp="1"/>
@@ -3515,8 +3900,8 @@
               <a:buNone/>
             </a:pPr>
             <a:r>
-              <a:rPr/>
-              <a:t>#Part 2 Multivariate Visuals with Ball Mapper</a:t>
+              <a:rPr baseline="-25000"/>
+              <a:t>Note that ancoats migrates from one ball to the next and eventually ends up in the high Grad% similiar housing market makeup alongside the quays by 2021. Note that on housing market makeup ancoats is most frequently similiar to chettam and quays to kersal. Note especially that in 1971 Quays had a housing market quite similiar to chettam and ancoats in 2011 and 2021 somewhat defying the trend</a:t>
             </a:r>
           </a:p>
         </p:txBody>
@@ -3556,7 +3941,7 @@
 </p:sld>
 </file>
 
-<file path=ppt/slides/slide6.xml><?xml version="1.0" encoding="utf-8"?>
+<file path=ppt/slides/slide8.xml><?xml version="1.0" encoding="utf-8"?>
 <p:sld xmlns:a="http://schemas.openxmlformats.org/drawingml/2006/main" xmlns:r="http://schemas.openxmlformats.org/officeDocument/2006/relationships" xmlns:p="http://schemas.openxmlformats.org/presentationml/2006/main">
   <p:cSld>
     <p:spTree>
@@ -3608,110 +3993,6 @@
 </p:sld>
 </file>
 
-<file path=ppt/slides/slide7.xml><?xml version="1.0" encoding="utf-8"?>
-<p:sld xmlns:a="http://schemas.openxmlformats.org/drawingml/2006/main" xmlns:r="http://schemas.openxmlformats.org/officeDocument/2006/relationships" xmlns:p="http://schemas.openxmlformats.org/presentationml/2006/main">
-  <p:cSld>
-    <p:spTree>
-      <p:nvGrpSpPr>
-        <p:cNvPr id="1" name=""/>
-        <p:cNvGrpSpPr/>
-        <p:nvPr/>
-      </p:nvGrpSpPr>
-      <p:grpSpPr>
-        <a:xfrm>
-          <a:off x="0" y="0"/>
-          <a:ext cx="0" cy="0"/>
-          <a:chOff x="0" y="0"/>
-          <a:chExt cx="0" cy="0"/>
-        </a:xfrm>
-      </p:grpSpPr>
-      <p:pic>
-        <p:nvPicPr>
-          <p:cNvPr descr="presentation_files/figure-pptx/unnamed-chunk-6-1.png" id="0" name="Picture 1"/>
-          <p:cNvPicPr>
-            <a:picLocks noGrp="1" noChangeAspect="1"/>
-          </p:cNvPicPr>
-          <p:nvPr/>
-        </p:nvPicPr>
-        <p:blipFill>
-          <a:blip r:embed="rId2"/>
-          <a:stretch>
-            <a:fillRect/>
-          </a:stretch>
-        </p:blipFill>
-        <p:spPr bwMode="auto">
-          <a:xfrm>
-            <a:off x="1524000" y="1193800"/>
-            <a:ext cx="6108700" cy="3390900"/>
-          </a:xfrm>
-          <a:prstGeom prst="rect">
-            <a:avLst/>
-          </a:prstGeom>
-          <a:noFill/>
-          <a:ln w="9525">
-            <a:noFill/>
-            <a:headEnd/>
-            <a:tailEnd/>
-          </a:ln>
-        </p:spPr>
-      </p:pic>
-    </p:spTree>
-  </p:cSld>
-</p:sld>
-</file>
-
-<file path=ppt/slides/slide8.xml><?xml version="1.0" encoding="utf-8"?>
-<p:sld xmlns:a="http://schemas.openxmlformats.org/drawingml/2006/main" xmlns:r="http://schemas.openxmlformats.org/officeDocument/2006/relationships" xmlns:p="http://schemas.openxmlformats.org/presentationml/2006/main">
-  <p:cSld>
-    <p:spTree>
-      <p:nvGrpSpPr>
-        <p:cNvPr id="1" name=""/>
-        <p:cNvGrpSpPr/>
-        <p:nvPr/>
-      </p:nvGrpSpPr>
-      <p:grpSpPr>
-        <a:xfrm>
-          <a:off x="0" y="0"/>
-          <a:ext cx="0" cy="0"/>
-          <a:chOff x="0" y="0"/>
-          <a:chExt cx="0" cy="0"/>
-        </a:xfrm>
-      </p:grpSpPr>
-      <p:pic>
-        <p:nvPicPr>
-          <p:cNvPr descr="presentation_files/figure-pptx/unnamed-chunk-7-1.png" id="0" name="Picture 1"/>
-          <p:cNvPicPr>
-            <a:picLocks noGrp="1" noChangeAspect="1"/>
-          </p:cNvPicPr>
-          <p:nvPr/>
-        </p:nvPicPr>
-        <p:blipFill>
-          <a:blip r:embed="rId2"/>
-          <a:stretch>
-            <a:fillRect/>
-          </a:stretch>
-        </p:blipFill>
-        <p:spPr bwMode="auto">
-          <a:xfrm>
-            <a:off x="1524000" y="1193800"/>
-            <a:ext cx="6108700" cy="3390900"/>
-          </a:xfrm>
-          <a:prstGeom prst="rect">
-            <a:avLst/>
-          </a:prstGeom>
-          <a:noFill/>
-          <a:ln w="9525">
-            <a:noFill/>
-            <a:headEnd/>
-            <a:tailEnd/>
-          </a:ln>
-        </p:spPr>
-      </p:pic>
-    </p:spTree>
-  </p:cSld>
-</p:sld>
-</file>
-
 <file path=ppt/slides/slide9.xml><?xml version="1.0" encoding="utf-8"?>
 <p:sld xmlns:a="http://schemas.openxmlformats.org/drawingml/2006/main" xmlns:r="http://schemas.openxmlformats.org/officeDocument/2006/relationships" xmlns:p="http://schemas.openxmlformats.org/presentationml/2006/main">
   <p:cSld>
@@ -3729,9 +4010,34 @@
           <a:chExt cx="0" cy="0"/>
         </a:xfrm>
       </p:grpSpPr>
+      <p:sp>
+        <p:nvSpPr>
+          <p:cNvPr id="4" name="Text Placeholder 3"/>
+          <p:cNvSpPr>
+            <a:spLocks noGrp="1"/>
+          </p:cNvSpPr>
+          <p:nvPr>
+            <p:ph idx="2" sz="half" type="body"/>
+          </p:nvPr>
+        </p:nvSpPr>
+        <p:spPr/>
+        <p:txBody>
+          <a:bodyPr/>
+          <a:lstStyle/>
+          <a:p>
+            <a:pPr lvl="0" indent="0" marL="0">
+              <a:buNone/>
+            </a:pPr>
+            <a:r>
+              <a:rPr baseline="-25000"/>
+              <a:t>Ancoats and Quays ended up being slightly(about 2%) more european born given their housing makeup but as obvious from the graph the difference to other areas and times is very minor around 1 and 2 percent. Gentrification was associated with a slightly larger increase in european migration but the difference is practically negligible</a:t>
+            </a:r>
+          </a:p>
+        </p:txBody>
+      </p:sp>
       <p:pic>
         <p:nvPicPr>
-          <p:cNvPr descr="presentation_files/figure-pptx/unnamed-chunk-8-1.png" id="0" name="Picture 1"/>
+          <p:cNvPr descr="presentation_files/figure-pptx/unnamed-chunk-6-1.png" id="0" name="Picture 1"/>
           <p:cNvPicPr>
             <a:picLocks noGrp="1" noChangeAspect="1"/>
           </p:cNvPicPr>
@@ -3745,8 +4051,8 @@
         </p:blipFill>
         <p:spPr bwMode="auto">
           <a:xfrm>
-            <a:off x="1524000" y="1193800"/>
-            <a:ext cx="6108700" cy="3390900"/>
+            <a:off x="3568700" y="977900"/>
+            <a:ext cx="5105400" cy="2832100"/>
           </a:xfrm>
           <a:prstGeom prst="rect">
             <a:avLst/>

--- a/presentation.pptx
+++ b/presentation.pptx
@@ -17,7 +17,6 @@
     <p:sldId id="265" r:id="rId11"/>
     <p:sldId id="266" r:id="rId12"/>
     <p:sldId id="267" r:id="rId13"/>
-    <p:sldId id="268" r:id="rId14"/>
   </p:sldIdLst>
   <p:sldSz cx="9144000" cy="5143500" type="screen16x9"/>
   <p:notesSz cx="6858000" cy="9144000"/>
@@ -3184,83 +3183,6 @@
           <a:chExt cx="0" cy="0"/>
         </a:xfrm>
       </p:grpSpPr>
-      <p:sp>
-        <p:nvSpPr>
-          <p:cNvPr id="4" name="Text Placeholder 3"/>
-          <p:cNvSpPr>
-            <a:spLocks noGrp="1"/>
-          </p:cNvSpPr>
-          <p:nvPr>
-            <p:ph idx="2" sz="half" type="body"/>
-          </p:nvPr>
-        </p:nvSpPr>
-        <p:spPr/>
-        <p:txBody>
-          <a:bodyPr/>
-          <a:lstStyle/>
-          <a:p>
-            <a:pPr lvl="0" indent="0" marL="0">
-              <a:buNone/>
-            </a:pPr>
-            <a:r>
-              <a:rPr baseline="-25000"/>
-              <a:t>Nice and tight yellow-orange cluster of share of those neither of european or british descent between 15-20 percent includes both gentrifying and non gentrifying areas. Descent doesn’t seem to have a strong relationship with gentrification in the same way that same %Grads does</a:t>
-            </a:r>
-          </a:p>
-        </p:txBody>
-      </p:sp>
-      <p:pic>
-        <p:nvPicPr>
-          <p:cNvPr descr="presentation_files/figure-pptx/unnamed-chunk-7-1.png" id="0" name="Picture 1"/>
-          <p:cNvPicPr>
-            <a:picLocks noGrp="1" noChangeAspect="1"/>
-          </p:cNvPicPr>
-          <p:nvPr/>
-        </p:nvPicPr>
-        <p:blipFill>
-          <a:blip r:embed="rId2"/>
-          <a:stretch>
-            <a:fillRect/>
-          </a:stretch>
-        </p:blipFill>
-        <p:spPr bwMode="auto">
-          <a:xfrm>
-            <a:off x="3568700" y="977900"/>
-            <a:ext cx="5105400" cy="2832100"/>
-          </a:xfrm>
-          <a:prstGeom prst="rect">
-            <a:avLst/>
-          </a:prstGeom>
-          <a:noFill/>
-          <a:ln w="9525">
-            <a:noFill/>
-            <a:headEnd/>
-            <a:tailEnd/>
-          </a:ln>
-        </p:spPr>
-      </p:pic>
-    </p:spTree>
-  </p:cSld>
-</p:sld>
-</file>
-
-<file path=ppt/slides/slide11.xml><?xml version="1.0" encoding="utf-8"?>
-<p:sld xmlns:a="http://schemas.openxmlformats.org/drawingml/2006/main" xmlns:r="http://schemas.openxmlformats.org/officeDocument/2006/relationships" xmlns:p="http://schemas.openxmlformats.org/presentationml/2006/main">
-  <p:cSld>
-    <p:spTree>
-      <p:nvGrpSpPr>
-        <p:cNvPr id="1" name=""/>
-        <p:cNvGrpSpPr/>
-        <p:nvPr/>
-      </p:nvGrpSpPr>
-      <p:grpSpPr>
-        <a:xfrm>
-          <a:off x="0" y="0"/>
-          <a:ext cx="0" cy="0"/>
-          <a:chOff x="0" y="0"/>
-          <a:chExt cx="0" cy="0"/>
-        </a:xfrm>
-      </p:grpSpPr>
       <p:pic>
         <p:nvPicPr>
           <p:cNvPr descr="presentation_files/figure-pptx/unnamed-chunk-8-1.png" id="0" name="Picture 1"/>
@@ -3296,7 +3218,7 @@
 </p:sld>
 </file>
 
-<file path=ppt/slides/slide12.xml><?xml version="1.0" encoding="utf-8"?>
+<file path=ppt/slides/slide11.xml><?xml version="1.0" encoding="utf-8"?>
 <p:sld xmlns:a="http://schemas.openxmlformats.org/drawingml/2006/main" xmlns:r="http://schemas.openxmlformats.org/officeDocument/2006/relationships" xmlns:p="http://schemas.openxmlformats.org/presentationml/2006/main">
   <p:cSld>
     <p:spTree>
@@ -3348,7 +3270,7 @@
 </p:sld>
 </file>
 
-<file path=ppt/slides/slide13.xml><?xml version="1.0" encoding="utf-8"?>
+<file path=ppt/slides/slide12.xml><?xml version="1.0" encoding="utf-8"?>
 <p:sld xmlns:a="http://schemas.openxmlformats.org/drawingml/2006/main" xmlns:r="http://schemas.openxmlformats.org/officeDocument/2006/relationships" xmlns:p="http://schemas.openxmlformats.org/presentationml/2006/main">
   <p:cSld>
     <p:spTree>
@@ -3419,12 +3341,12 @@
       </p:grpSpPr>
       <p:sp>
         <p:nvSpPr>
-          <p:cNvPr id="2" name="Title 1"/>
-          <p:cNvSpPr>
-            <a:spLocks noGrp="1"/>
-          </p:cNvSpPr>
-          <p:nvPr>
-            <p:ph type="title"/>
+          <p:cNvPr id="3" name="Content Placeholder 2"/>
+          <p:cNvSpPr>
+            <a:spLocks noGrp="1"/>
+          </p:cNvSpPr>
+          <p:nvPr>
+            <p:ph idx="1"/>
           </p:nvPr>
         </p:nvSpPr>
         <p:spPr/>
@@ -3433,29 +3355,16 @@
           <a:lstStyle/>
           <a:p>
             <a:pPr lvl="0" indent="0" marL="0">
+              <a:spcBef>
+                <a:spcPts val="3000"/>
+              </a:spcBef>
               <a:buNone/>
             </a:pPr>
             <a:r>
-              <a:rPr/>
+              <a:rPr b="1"/>
               <a:t>Definition</a:t>
             </a:r>
           </a:p>
-        </p:txBody>
-      </p:sp>
-      <p:sp>
-        <p:nvSpPr>
-          <p:cNvPr id="3" name="Content Placeholder 2"/>
-          <p:cNvSpPr>
-            <a:spLocks noGrp="1"/>
-          </p:cNvSpPr>
-          <p:nvPr>
-            <p:ph idx="1"/>
-          </p:nvPr>
-        </p:nvSpPr>
-        <p:spPr/>
-        <p:txBody>
-          <a:bodyPr/>
-          <a:lstStyle/>
           <a:p>
             <a:pPr lvl="0" indent="0" marL="0">
               <a:buNone/>
@@ -3511,8 +3420,8 @@
         </p:nvSpPr>
         <p:spPr>
           <a:xfrm>
-            <a:off x="722313" y="3305176"/>
-            <a:ext cx="7772400" cy="1021556"/>
+            <a:off x="457201" y="204787"/>
+            <a:ext cx="3008313" cy="871538"/>
           </a:xfrm>
         </p:spPr>
         <p:txBody>
@@ -3529,6 +3438,64 @@
           </a:p>
         </p:txBody>
       </p:sp>
+      <p:sp>
+        <p:nvSpPr>
+          <p:cNvPr id="4" name="Text Placeholder 3"/>
+          <p:cNvSpPr>
+            <a:spLocks noGrp="1"/>
+          </p:cNvSpPr>
+          <p:nvPr>
+            <p:ph idx="2" sz="half" type="body"/>
+          </p:nvPr>
+        </p:nvSpPr>
+        <p:spPr/>
+        <p:txBody>
+          <a:bodyPr/>
+          <a:lstStyle/>
+          <a:p>
+            <a:pPr lvl="0" indent="0" marL="0">
+              <a:spcBef>
+                <a:spcPts val="3000"/>
+              </a:spcBef>
+              <a:buNone/>
+            </a:pPr>
+            <a:r>
+              <a:rPr b="1"/>
+              <a:t>Labour Market Makeup and Gentrification</a:t>
+            </a:r>
+          </a:p>
+        </p:txBody>
+      </p:sp>
+      <p:pic>
+        <p:nvPicPr>
+          <p:cNvPr descr="presentation_files/figure-pptx/unnamed-chunk-1-1.png" id="0" name="Picture 1"/>
+          <p:cNvPicPr>
+            <a:picLocks noGrp="1" noChangeAspect="1"/>
+          </p:cNvPicPr>
+          <p:nvPr/>
+        </p:nvPicPr>
+        <p:blipFill>
+          <a:blip r:embed="rId2"/>
+          <a:stretch>
+            <a:fillRect/>
+          </a:stretch>
+        </p:blipFill>
+        <p:spPr bwMode="auto">
+          <a:xfrm>
+            <a:off x="3568700" y="1117600"/>
+            <a:ext cx="5105400" cy="2552700"/>
+          </a:xfrm>
+          <a:prstGeom prst="rect">
+            <a:avLst/>
+          </a:prstGeom>
+          <a:noFill/>
+          <a:ln w="9525">
+            <a:noFill/>
+            <a:headEnd/>
+            <a:tailEnd/>
+          </a:ln>
+        </p:spPr>
+      </p:pic>
     </p:spTree>
   </p:cSld>
 </p:sld>
@@ -3553,12 +3520,12 @@
       </p:grpSpPr>
       <p:sp>
         <p:nvSpPr>
-          <p:cNvPr id="2" name="Title 1"/>
-          <p:cNvSpPr>
-            <a:spLocks noGrp="1"/>
-          </p:cNvSpPr>
-          <p:nvPr>
-            <p:ph type="title"/>
+          <p:cNvPr id="4" name="Text Placeholder 3"/>
+          <p:cNvSpPr>
+            <a:spLocks noGrp="1"/>
+          </p:cNvSpPr>
+          <p:nvPr>
+            <p:ph idx="2" sz="half" type="body"/>
           </p:nvPr>
         </p:nvSpPr>
         <p:spPr/>
@@ -3567,18 +3534,39 @@
           <a:lstStyle/>
           <a:p>
             <a:pPr lvl="0" indent="0" marL="0">
+              <a:spcBef>
+                <a:spcPts val="3000"/>
+              </a:spcBef>
               <a:buNone/>
             </a:pPr>
             <a:r>
+              <a:rPr b="1"/>
+              <a:t>Housing Market Makeup and Gentrification</a:t>
+            </a:r>
+          </a:p>
+          <a:p>
+            <a:pPr lvl="0" indent="0" marL="0">
+              <a:buNone/>
+            </a:pPr>
+            <a:r>
+              <a:rPr baseline="-25000"/>
+              <a:t>Comparatively larger increase in grads in gentrifying areas with divergence starting around 1991 census wave.following right to buy owner occupied tenure rises in gentrified areas between 1980-2000 but then drops and flatlines. Very low effect on non gentrified areas though.Following the peak in owner occupied tenure rented and other tenures in ancoats and quays massively overtake those in neighbors around 2000 proportional to the initial Right to Buy effect.</a:t>
+            </a:r>
+          </a:p>
+          <a:p>
+            <a:pPr lvl="0" indent="0" marL="0">
+              <a:buNone/>
+            </a:pPr>
+            <a:r>
               <a:rPr/>
-              <a:t>Labour Market Makeup and Gentrification</a:t>
+              <a:t>Could be granger causal? Right to Buy -&gt; Lag-2Coucnil_tenure- -&gt; Lag-1Owner_tenure(+) -&gt;Renting Boom</a:t>
             </a:r>
           </a:p>
         </p:txBody>
       </p:sp>
       <p:pic>
         <p:nvPicPr>
-          <p:cNvPr descr="presentation_files/figure-pptx/unnamed-chunk-1-1.png" id="0" name="Picture 1"/>
+          <p:cNvPr descr="presentation_files/figure-pptx/unnamed-chunk-2-1.png" id="0" name="Picture 1"/>
           <p:cNvPicPr>
             <a:picLocks noGrp="1" noChangeAspect="1"/>
           </p:cNvPicPr>
@@ -3592,8 +3580,8 @@
         </p:blipFill>
         <p:spPr bwMode="auto">
           <a:xfrm>
-            <a:off x="1181100" y="1193800"/>
-            <a:ext cx="6781800" cy="3390900"/>
+            <a:off x="3568700" y="685800"/>
+            <a:ext cx="5105400" cy="3403600"/>
           </a:xfrm>
           <a:prstGeom prst="rect">
             <a:avLst/>
@@ -3630,71 +3618,44 @@
       </p:grpSpPr>
       <p:sp>
         <p:nvSpPr>
-          <p:cNvPr id="2" name="Title 1"/>
-          <p:cNvSpPr>
-            <a:spLocks noGrp="1"/>
-          </p:cNvSpPr>
-          <p:nvPr>
-            <p:ph type="title"/>
-          </p:nvPr>
-        </p:nvSpPr>
-        <p:spPr>
-          <a:xfrm>
-            <a:off x="457201" y="204787"/>
-            <a:ext cx="3008313" cy="871538"/>
-          </a:xfrm>
-        </p:spPr>
+          <p:cNvPr id="4" name="Text Placeholder 3"/>
+          <p:cNvSpPr>
+            <a:spLocks noGrp="1"/>
+          </p:cNvSpPr>
+          <p:nvPr>
+            <p:ph idx="2" sz="half" type="body"/>
+          </p:nvPr>
+        </p:nvSpPr>
+        <p:spPr/>
         <p:txBody>
           <a:bodyPr/>
           <a:lstStyle/>
           <a:p>
             <a:pPr lvl="0" indent="0" marL="0">
+              <a:spcBef>
+                <a:spcPts val="3000"/>
+              </a:spcBef>
               <a:buNone/>
             </a:pPr>
             <a:r>
-              <a:rPr/>
-              <a:t>Housing Market Makeup and Gentrification</a:t>
-            </a:r>
-          </a:p>
-        </p:txBody>
-      </p:sp>
-      <p:sp>
-        <p:nvSpPr>
-          <p:cNvPr id="4" name="Text Placeholder 3"/>
-          <p:cNvSpPr>
-            <a:spLocks noGrp="1"/>
-          </p:cNvSpPr>
-          <p:nvPr>
-            <p:ph idx="2" sz="half" type="body"/>
-          </p:nvPr>
-        </p:nvSpPr>
-        <p:spPr/>
-        <p:txBody>
-          <a:bodyPr/>
-          <a:lstStyle/>
+              <a:rPr b="1"/>
+              <a:t>Country of Birth and Gentrification</a:t>
+            </a:r>
+          </a:p>
           <a:p>
             <a:pPr lvl="0" indent="0" marL="0">
               <a:buNone/>
             </a:pPr>
             <a:r>
               <a:rPr baseline="-25000"/>
-              <a:t>Comparatively larger increase in grads in gentrifying areas with divergence starting around 1991 census wave.following right to buy owner occupied tenure rises in gentrified areas between 1980-2000 but then drops and flatlines. Very low effect on non gentrified areas though.Following the peak in owner occupied tenure rented and other tenures in ancoats and quays massively overtake those in neighbors around 2000 proportional to the initial Right to Buy effect.</a:t>
-            </a:r>
-          </a:p>
-          <a:p>
-            <a:pPr lvl="0" indent="0" marL="0">
-              <a:buNone/>
-            </a:pPr>
-            <a:r>
-              <a:rPr/>
-              <a:t>Could be granger causal? Right to Buy -&gt; Lag-2Coucnil_tenure- -&gt; Lag-1Owner_tenure(+) -&gt;Renting Boom</a:t>
+              <a:t>Housing Makeup and share of those born in UK don’t seem to be that strongly associated with both groups experiencing similiar migration patterns with a notable exception of Europeans with notably parallel trends</a:t>
             </a:r>
           </a:p>
         </p:txBody>
       </p:sp>
       <p:pic>
         <p:nvPicPr>
-          <p:cNvPr descr="presentation_files/figure-pptx/unnamed-chunk-2-1.png" id="0" name="Picture 1"/>
+          <p:cNvPr descr="presentation_files/figure-pptx/unnamed-chunk-3-1.png" id="0" name="Picture 1"/>
           <p:cNvPicPr>
             <a:picLocks noGrp="1" noChangeAspect="1"/>
           </p:cNvPicPr>
@@ -3769,113 +3730,6 @@
             </a:pPr>
             <a:r>
               <a:rPr/>
-              <a:t>Country of Birth and Gentrification</a:t>
-            </a:r>
-          </a:p>
-        </p:txBody>
-      </p:sp>
-      <p:sp>
-        <p:nvSpPr>
-          <p:cNvPr id="4" name="Text Placeholder 3"/>
-          <p:cNvSpPr>
-            <a:spLocks noGrp="1"/>
-          </p:cNvSpPr>
-          <p:nvPr>
-            <p:ph idx="2" sz="half" type="body"/>
-          </p:nvPr>
-        </p:nvSpPr>
-        <p:spPr/>
-        <p:txBody>
-          <a:bodyPr/>
-          <a:lstStyle/>
-          <a:p>
-            <a:pPr lvl="0" indent="0" marL="0">
-              <a:buNone/>
-            </a:pPr>
-            <a:r>
-              <a:rPr baseline="-25000"/>
-              <a:t>Housing Makeup and share of those born in UK don’t seem to be that strongly associated with both groups experiencing similiar migration patterns with a notable exception of Europeans with notably parallel trends</a:t>
-            </a:r>
-          </a:p>
-        </p:txBody>
-      </p:sp>
-      <p:pic>
-        <p:nvPicPr>
-          <p:cNvPr descr="presentation_files/figure-pptx/unnamed-chunk-3-1.png" id="0" name="Picture 1"/>
-          <p:cNvPicPr>
-            <a:picLocks noGrp="1" noChangeAspect="1"/>
-          </p:cNvPicPr>
-          <p:nvPr/>
-        </p:nvPicPr>
-        <p:blipFill>
-          <a:blip r:embed="rId2"/>
-          <a:stretch>
-            <a:fillRect/>
-          </a:stretch>
-        </p:blipFill>
-        <p:spPr bwMode="auto">
-          <a:xfrm>
-            <a:off x="3568700" y="685800"/>
-            <a:ext cx="5105400" cy="3403600"/>
-          </a:xfrm>
-          <a:prstGeom prst="rect">
-            <a:avLst/>
-          </a:prstGeom>
-          <a:noFill/>
-          <a:ln w="9525">
-            <a:noFill/>
-            <a:headEnd/>
-            <a:tailEnd/>
-          </a:ln>
-        </p:spPr>
-      </p:pic>
-    </p:spTree>
-  </p:cSld>
-</p:sld>
-</file>
-
-<file path=ppt/slides/slide7.xml><?xml version="1.0" encoding="utf-8"?>
-<p:sld xmlns:a="http://schemas.openxmlformats.org/drawingml/2006/main" xmlns:r="http://schemas.openxmlformats.org/officeDocument/2006/relationships" xmlns:p="http://schemas.openxmlformats.org/presentationml/2006/main">
-  <p:cSld>
-    <p:spTree>
-      <p:nvGrpSpPr>
-        <p:cNvPr id="1" name=""/>
-        <p:cNvGrpSpPr/>
-        <p:nvPr/>
-      </p:nvGrpSpPr>
-      <p:grpSpPr>
-        <a:xfrm>
-          <a:off x="0" y="0"/>
-          <a:ext cx="0" cy="0"/>
-          <a:chOff x="0" y="0"/>
-          <a:chExt cx="0" cy="0"/>
-        </a:xfrm>
-      </p:grpSpPr>
-      <p:sp>
-        <p:nvSpPr>
-          <p:cNvPr id="2" name="Title 1"/>
-          <p:cNvSpPr>
-            <a:spLocks noGrp="1"/>
-          </p:cNvSpPr>
-          <p:nvPr>
-            <p:ph type="title"/>
-          </p:nvPr>
-        </p:nvSpPr>
-        <p:spPr>
-          <a:xfrm>
-            <a:off x="457201" y="204787"/>
-            <a:ext cx="3008313" cy="871538"/>
-          </a:xfrm>
-        </p:spPr>
-        <p:txBody>
-          <a:bodyPr/>
-          <a:lstStyle/>
-          <a:p>
-            <a:pPr lvl="0" indent="0" marL="0">
-              <a:buNone/>
-            </a:pPr>
-            <a:r>
-              <a:rPr/>
               <a:t>Part 2 Multivariate Visuals with Ball Mapper</a:t>
             </a:r>
           </a:p>
@@ -3941,7 +3795,7 @@
 </p:sld>
 </file>
 
-<file path=ppt/slides/slide8.xml><?xml version="1.0" encoding="utf-8"?>
+<file path=ppt/slides/slide7.xml><?xml version="1.0" encoding="utf-8"?>
 <p:sld xmlns:a="http://schemas.openxmlformats.org/drawingml/2006/main" xmlns:r="http://schemas.openxmlformats.org/officeDocument/2006/relationships" xmlns:p="http://schemas.openxmlformats.org/presentationml/2006/main">
   <p:cSld>
     <p:spTree>
@@ -3993,6 +3847,83 @@
 </p:sld>
 </file>
 
+<file path=ppt/slides/slide8.xml><?xml version="1.0" encoding="utf-8"?>
+<p:sld xmlns:a="http://schemas.openxmlformats.org/drawingml/2006/main" xmlns:r="http://schemas.openxmlformats.org/officeDocument/2006/relationships" xmlns:p="http://schemas.openxmlformats.org/presentationml/2006/main">
+  <p:cSld>
+    <p:spTree>
+      <p:nvGrpSpPr>
+        <p:cNvPr id="1" name=""/>
+        <p:cNvGrpSpPr/>
+        <p:nvPr/>
+      </p:nvGrpSpPr>
+      <p:grpSpPr>
+        <a:xfrm>
+          <a:off x="0" y="0"/>
+          <a:ext cx="0" cy="0"/>
+          <a:chOff x="0" y="0"/>
+          <a:chExt cx="0" cy="0"/>
+        </a:xfrm>
+      </p:grpSpPr>
+      <p:sp>
+        <p:nvSpPr>
+          <p:cNvPr id="4" name="Text Placeholder 3"/>
+          <p:cNvSpPr>
+            <a:spLocks noGrp="1"/>
+          </p:cNvSpPr>
+          <p:nvPr>
+            <p:ph idx="2" sz="half" type="body"/>
+          </p:nvPr>
+        </p:nvSpPr>
+        <p:spPr/>
+        <p:txBody>
+          <a:bodyPr/>
+          <a:lstStyle/>
+          <a:p>
+            <a:pPr lvl="0" indent="0" marL="0">
+              <a:buNone/>
+            </a:pPr>
+            <a:r>
+              <a:rPr baseline="-25000"/>
+              <a:t>Ancoats and Quays ended up being slightly(about 2%) more european born given their housing makeup but as obvious from the graph the difference to other areas and times is very minor around 1 and 2 percent. Gentrification was associated with a slightly larger increase in european migration but the difference is practically negligible</a:t>
+            </a:r>
+          </a:p>
+        </p:txBody>
+      </p:sp>
+      <p:pic>
+        <p:nvPicPr>
+          <p:cNvPr descr="presentation_files/figure-pptx/unnamed-chunk-6-1.png" id="0" name="Picture 1"/>
+          <p:cNvPicPr>
+            <a:picLocks noGrp="1" noChangeAspect="1"/>
+          </p:cNvPicPr>
+          <p:nvPr/>
+        </p:nvPicPr>
+        <p:blipFill>
+          <a:blip r:embed="rId2"/>
+          <a:stretch>
+            <a:fillRect/>
+          </a:stretch>
+        </p:blipFill>
+        <p:spPr bwMode="auto">
+          <a:xfrm>
+            <a:off x="3568700" y="977900"/>
+            <a:ext cx="5105400" cy="2832100"/>
+          </a:xfrm>
+          <a:prstGeom prst="rect">
+            <a:avLst/>
+          </a:prstGeom>
+          <a:noFill/>
+          <a:ln w="9525">
+            <a:noFill/>
+            <a:headEnd/>
+            <a:tailEnd/>
+          </a:ln>
+        </p:spPr>
+      </p:pic>
+    </p:spTree>
+  </p:cSld>
+</p:sld>
+</file>
+
 <file path=ppt/slides/slide9.xml><?xml version="1.0" encoding="utf-8"?>
 <p:sld xmlns:a="http://schemas.openxmlformats.org/drawingml/2006/main" xmlns:r="http://schemas.openxmlformats.org/officeDocument/2006/relationships" xmlns:p="http://schemas.openxmlformats.org/presentationml/2006/main">
   <p:cSld>
@@ -4030,14 +3961,14 @@
             </a:pPr>
             <a:r>
               <a:rPr baseline="-25000"/>
-              <a:t>Ancoats and Quays ended up being slightly(about 2%) more european born given their housing makeup but as obvious from the graph the difference to other areas and times is very minor around 1 and 2 percent. Gentrification was associated with a slightly larger increase in european migration but the difference is practically negligible</a:t>
+              <a:t>Nice and tight yellow-orange cluster of share of those neither of european or british descent between 15-20 percent includes both gentrifying and non gentrifying areas. Descent doesn’t seem to have a strong relationship with gentrification in the same way that same %Grads does</a:t>
             </a:r>
           </a:p>
         </p:txBody>
       </p:sp>
       <p:pic>
         <p:nvPicPr>
-          <p:cNvPr descr="presentation_files/figure-pptx/unnamed-chunk-6-1.png" id="0" name="Picture 1"/>
+          <p:cNvPr descr="presentation_files/figure-pptx/unnamed-chunk-7-1.png" id="0" name="Picture 1"/>
           <p:cNvPicPr>
             <a:picLocks noGrp="1" noChangeAspect="1"/>
           </p:cNvPicPr>

--- a/presentation.pptx
+++ b/presentation.pptx
@@ -17,6 +17,12 @@
     <p:sldId id="265" r:id="rId11"/>
     <p:sldId id="266" r:id="rId12"/>
     <p:sldId id="267" r:id="rId13"/>
+    <p:sldId id="268" r:id="rId14"/>
+    <p:sldId id="269" r:id="rId15"/>
+    <p:sldId id="270" r:id="rId16"/>
+    <p:sldId id="271" r:id="rId17"/>
+    <p:sldId id="272" r:id="rId18"/>
+    <p:sldId id="273" r:id="rId19"/>
   </p:sldIdLst>
   <p:sldSz cx="9144000" cy="5143500" type="screen16x9"/>
   <p:notesSz cx="6858000" cy="9144000"/>
@@ -3322,6 +3328,343 @@
 </p:sld>
 </file>
 
+<file path=ppt/slides/slide13.xml><?xml version="1.0" encoding="utf-8"?>
+<p:sld xmlns:a="http://schemas.openxmlformats.org/drawingml/2006/main" xmlns:r="http://schemas.openxmlformats.org/officeDocument/2006/relationships" xmlns:p="http://schemas.openxmlformats.org/presentationml/2006/main">
+  <p:cSld>
+    <p:spTree>
+      <p:nvGrpSpPr>
+        <p:cNvPr id="1" name=""/>
+        <p:cNvGrpSpPr/>
+        <p:nvPr/>
+      </p:nvGrpSpPr>
+      <p:grpSpPr>
+        <a:xfrm>
+          <a:off x="0" y="0"/>
+          <a:ext cx="0" cy="0"/>
+          <a:chOff x="0" y="0"/>
+          <a:chExt cx="0" cy="0"/>
+        </a:xfrm>
+      </p:grpSpPr>
+      <p:sp>
+        <p:nvSpPr>
+          <p:cNvPr id="2" name="Title 1"/>
+          <p:cNvSpPr>
+            <a:spLocks noGrp="1"/>
+          </p:cNvSpPr>
+          <p:nvPr>
+            <p:ph type="title"/>
+          </p:nvPr>
+        </p:nvSpPr>
+        <p:spPr/>
+        <p:txBody>
+          <a:bodyPr/>
+          <a:lstStyle/>
+          <a:p>
+            <a:pPr lvl="0" indent="0" marL="0">
+              <a:buNone/>
+            </a:pPr>
+            <a:r>
+              <a:rPr/>
+              <a:t>Part 3 What if? approximate counterfactuals with first differences</a:t>
+            </a:r>
+          </a:p>
+        </p:txBody>
+      </p:sp>
+      <p:pic>
+        <p:nvPicPr>
+          <p:cNvPr descr="presentation_files/figure-pptx/unnamed-chunk-12-1.png" id="0" name="Picture 1"/>
+          <p:cNvPicPr>
+            <a:picLocks noGrp="1" noChangeAspect="1"/>
+          </p:cNvPicPr>
+          <p:nvPr/>
+        </p:nvPicPr>
+        <p:blipFill>
+          <a:blip r:embed="rId2"/>
+          <a:stretch>
+            <a:fillRect/>
+          </a:stretch>
+        </p:blipFill>
+        <p:spPr bwMode="auto">
+          <a:xfrm>
+            <a:off x="1181100" y="1193800"/>
+            <a:ext cx="6781800" cy="3390900"/>
+          </a:xfrm>
+          <a:prstGeom prst="rect">
+            <a:avLst/>
+          </a:prstGeom>
+          <a:noFill/>
+          <a:ln w="9525">
+            <a:noFill/>
+            <a:headEnd/>
+            <a:tailEnd/>
+          </a:ln>
+        </p:spPr>
+      </p:pic>
+    </p:spTree>
+  </p:cSld>
+</p:sld>
+</file>
+
+<file path=ppt/slides/slide14.xml><?xml version="1.0" encoding="utf-8"?>
+<p:sld xmlns:a="http://schemas.openxmlformats.org/drawingml/2006/main" xmlns:r="http://schemas.openxmlformats.org/officeDocument/2006/relationships" xmlns:p="http://schemas.openxmlformats.org/presentationml/2006/main">
+  <p:cSld>
+    <p:spTree>
+      <p:nvGrpSpPr>
+        <p:cNvPr id="1" name=""/>
+        <p:cNvGrpSpPr/>
+        <p:nvPr/>
+      </p:nvGrpSpPr>
+      <p:grpSpPr>
+        <a:xfrm>
+          <a:off x="0" y="0"/>
+          <a:ext cx="0" cy="0"/>
+          <a:chOff x="0" y="0"/>
+          <a:chExt cx="0" cy="0"/>
+        </a:xfrm>
+      </p:grpSpPr>
+      <p:pic>
+        <p:nvPicPr>
+          <p:cNvPr descr="presentation_files/figure-pptx/unnamed-chunk-12-2.png" id="0" name="Picture 1"/>
+          <p:cNvPicPr>
+            <a:picLocks noGrp="1" noChangeAspect="1"/>
+          </p:cNvPicPr>
+          <p:nvPr/>
+        </p:nvPicPr>
+        <p:blipFill>
+          <a:blip r:embed="rId2"/>
+          <a:stretch>
+            <a:fillRect/>
+          </a:stretch>
+        </p:blipFill>
+        <p:spPr bwMode="auto">
+          <a:xfrm>
+            <a:off x="1181100" y="1193800"/>
+            <a:ext cx="6781800" cy="3390900"/>
+          </a:xfrm>
+          <a:prstGeom prst="rect">
+            <a:avLst/>
+          </a:prstGeom>
+          <a:noFill/>
+          <a:ln w="9525">
+            <a:noFill/>
+            <a:headEnd/>
+            <a:tailEnd/>
+          </a:ln>
+        </p:spPr>
+      </p:pic>
+    </p:spTree>
+  </p:cSld>
+</p:sld>
+</file>
+
+<file path=ppt/slides/slide15.xml><?xml version="1.0" encoding="utf-8"?>
+<p:sld xmlns:a="http://schemas.openxmlformats.org/drawingml/2006/main" xmlns:r="http://schemas.openxmlformats.org/officeDocument/2006/relationships" xmlns:p="http://schemas.openxmlformats.org/presentationml/2006/main">
+  <p:cSld>
+    <p:spTree>
+      <p:nvGrpSpPr>
+        <p:cNvPr id="1" name=""/>
+        <p:cNvGrpSpPr/>
+        <p:nvPr/>
+      </p:nvGrpSpPr>
+      <p:grpSpPr>
+        <a:xfrm>
+          <a:off x="0" y="0"/>
+          <a:ext cx="0" cy="0"/>
+          <a:chOff x="0" y="0"/>
+          <a:chExt cx="0" cy="0"/>
+        </a:xfrm>
+      </p:grpSpPr>
+      <p:pic>
+        <p:nvPicPr>
+          <p:cNvPr descr="presentation_files/figure-pptx/unnamed-chunk-13-1.png" id="0" name="Picture 1"/>
+          <p:cNvPicPr>
+            <a:picLocks noGrp="1" noChangeAspect="1"/>
+          </p:cNvPicPr>
+          <p:nvPr/>
+        </p:nvPicPr>
+        <p:blipFill>
+          <a:blip r:embed="rId2"/>
+          <a:stretch>
+            <a:fillRect/>
+          </a:stretch>
+        </p:blipFill>
+        <p:spPr bwMode="auto">
+          <a:xfrm>
+            <a:off x="1181100" y="1193800"/>
+            <a:ext cx="6781800" cy="3390900"/>
+          </a:xfrm>
+          <a:prstGeom prst="rect">
+            <a:avLst/>
+          </a:prstGeom>
+          <a:noFill/>
+          <a:ln w="9525">
+            <a:noFill/>
+            <a:headEnd/>
+            <a:tailEnd/>
+          </a:ln>
+        </p:spPr>
+      </p:pic>
+    </p:spTree>
+  </p:cSld>
+</p:sld>
+</file>
+
+<file path=ppt/slides/slide16.xml><?xml version="1.0" encoding="utf-8"?>
+<p:sld xmlns:a="http://schemas.openxmlformats.org/drawingml/2006/main" xmlns:r="http://schemas.openxmlformats.org/officeDocument/2006/relationships" xmlns:p="http://schemas.openxmlformats.org/presentationml/2006/main">
+  <p:cSld>
+    <p:spTree>
+      <p:nvGrpSpPr>
+        <p:cNvPr id="1" name=""/>
+        <p:cNvGrpSpPr/>
+        <p:nvPr/>
+      </p:nvGrpSpPr>
+      <p:grpSpPr>
+        <a:xfrm>
+          <a:off x="0" y="0"/>
+          <a:ext cx="0" cy="0"/>
+          <a:chOff x="0" y="0"/>
+          <a:chExt cx="0" cy="0"/>
+        </a:xfrm>
+      </p:grpSpPr>
+      <p:pic>
+        <p:nvPicPr>
+          <p:cNvPr descr="presentation_files/figure-pptx/unnamed-chunk-13-2.png" id="0" name="Picture 1"/>
+          <p:cNvPicPr>
+            <a:picLocks noGrp="1" noChangeAspect="1"/>
+          </p:cNvPicPr>
+          <p:nvPr/>
+        </p:nvPicPr>
+        <p:blipFill>
+          <a:blip r:embed="rId2"/>
+          <a:stretch>
+            <a:fillRect/>
+          </a:stretch>
+        </p:blipFill>
+        <p:spPr bwMode="auto">
+          <a:xfrm>
+            <a:off x="1181100" y="1193800"/>
+            <a:ext cx="6781800" cy="3390900"/>
+          </a:xfrm>
+          <a:prstGeom prst="rect">
+            <a:avLst/>
+          </a:prstGeom>
+          <a:noFill/>
+          <a:ln w="9525">
+            <a:noFill/>
+            <a:headEnd/>
+            <a:tailEnd/>
+          </a:ln>
+        </p:spPr>
+      </p:pic>
+    </p:spTree>
+  </p:cSld>
+</p:sld>
+</file>
+
+<file path=ppt/slides/slide17.xml><?xml version="1.0" encoding="utf-8"?>
+<p:sld xmlns:a="http://schemas.openxmlformats.org/drawingml/2006/main" xmlns:r="http://schemas.openxmlformats.org/officeDocument/2006/relationships" xmlns:p="http://schemas.openxmlformats.org/presentationml/2006/main">
+  <p:cSld>
+    <p:spTree>
+      <p:nvGrpSpPr>
+        <p:cNvPr id="1" name=""/>
+        <p:cNvGrpSpPr/>
+        <p:nvPr/>
+      </p:nvGrpSpPr>
+      <p:grpSpPr>
+        <a:xfrm>
+          <a:off x="0" y="0"/>
+          <a:ext cx="0" cy="0"/>
+          <a:chOff x="0" y="0"/>
+          <a:chExt cx="0" cy="0"/>
+        </a:xfrm>
+      </p:grpSpPr>
+      <p:pic>
+        <p:nvPicPr>
+          <p:cNvPr descr="presentation_files/figure-pptx/unnamed-chunk-14-1.png" id="0" name="Picture 1"/>
+          <p:cNvPicPr>
+            <a:picLocks noGrp="1" noChangeAspect="1"/>
+          </p:cNvPicPr>
+          <p:nvPr/>
+        </p:nvPicPr>
+        <p:blipFill>
+          <a:blip r:embed="rId2"/>
+          <a:stretch>
+            <a:fillRect/>
+          </a:stretch>
+        </p:blipFill>
+        <p:spPr bwMode="auto">
+          <a:xfrm>
+            <a:off x="1181100" y="1193800"/>
+            <a:ext cx="6781800" cy="3390900"/>
+          </a:xfrm>
+          <a:prstGeom prst="rect">
+            <a:avLst/>
+          </a:prstGeom>
+          <a:noFill/>
+          <a:ln w="9525">
+            <a:noFill/>
+            <a:headEnd/>
+            <a:tailEnd/>
+          </a:ln>
+        </p:spPr>
+      </p:pic>
+    </p:spTree>
+  </p:cSld>
+</p:sld>
+</file>
+
+<file path=ppt/slides/slide18.xml><?xml version="1.0" encoding="utf-8"?>
+<p:sld xmlns:a="http://schemas.openxmlformats.org/drawingml/2006/main" xmlns:r="http://schemas.openxmlformats.org/officeDocument/2006/relationships" xmlns:p="http://schemas.openxmlformats.org/presentationml/2006/main">
+  <p:cSld>
+    <p:spTree>
+      <p:nvGrpSpPr>
+        <p:cNvPr id="1" name=""/>
+        <p:cNvGrpSpPr/>
+        <p:nvPr/>
+      </p:nvGrpSpPr>
+      <p:grpSpPr>
+        <a:xfrm>
+          <a:off x="0" y="0"/>
+          <a:ext cx="0" cy="0"/>
+          <a:chOff x="0" y="0"/>
+          <a:chExt cx="0" cy="0"/>
+        </a:xfrm>
+      </p:grpSpPr>
+      <p:pic>
+        <p:nvPicPr>
+          <p:cNvPr descr="presentation_files/figure-pptx/unnamed-chunk-14-2.png" id="0" name="Picture 1"/>
+          <p:cNvPicPr>
+            <a:picLocks noGrp="1" noChangeAspect="1"/>
+          </p:cNvPicPr>
+          <p:nvPr/>
+        </p:nvPicPr>
+        <p:blipFill>
+          <a:blip r:embed="rId2"/>
+          <a:stretch>
+            <a:fillRect/>
+          </a:stretch>
+        </p:blipFill>
+        <p:spPr bwMode="auto">
+          <a:xfrm>
+            <a:off x="1181100" y="1193800"/>
+            <a:ext cx="6781800" cy="3390900"/>
+          </a:xfrm>
+          <a:prstGeom prst="rect">
+            <a:avLst/>
+          </a:prstGeom>
+          <a:noFill/>
+          <a:ln w="9525">
+            <a:noFill/>
+            <a:headEnd/>
+            <a:tailEnd/>
+          </a:ln>
+        </p:spPr>
+      </p:pic>
+    </p:spTree>
+  </p:cSld>
+</p:sld>
+</file>
+
 <file path=ppt/slides/slide2.xml><?xml version="1.0" encoding="utf-8"?>
 <p:sld xmlns:a="http://schemas.openxmlformats.org/drawingml/2006/main" xmlns:r="http://schemas.openxmlformats.org/officeDocument/2006/relationships" xmlns:p="http://schemas.openxmlformats.org/presentationml/2006/main">
   <p:cSld>
@@ -3730,7 +4073,7 @@
             </a:pPr>
             <a:r>
               <a:rPr/>
-              <a:t>Part 2 Multivariate Visuals with Ball Mapper</a:t>
+              <a:t>Part 2 Multivariate Visuals with Ball Mapper.Does Gentrification Structurally Manifest in the Data?</a:t>
             </a:r>
           </a:p>
         </p:txBody>

--- a/presentation.pptx
+++ b/presentation.pptx
@@ -23,6 +23,8 @@
     <p:sldId id="271" r:id="rId17"/>
     <p:sldId id="272" r:id="rId18"/>
     <p:sldId id="273" r:id="rId19"/>
+    <p:sldId id="274" r:id="rId20"/>
+    <p:sldId id="275" r:id="rId21"/>
   </p:sldIdLst>
   <p:sldSz cx="9144000" cy="5143500" type="screen16x9"/>
   <p:notesSz cx="6858000" cy="9144000"/>
@@ -3355,7 +3357,12 @@
             <p:ph type="title"/>
           </p:nvPr>
         </p:nvSpPr>
-        <p:spPr/>
+        <p:spPr>
+          <a:xfrm>
+            <a:off x="457201" y="204787"/>
+            <a:ext cx="3008313" cy="871538"/>
+          </a:xfrm>
+        </p:spPr>
         <p:txBody>
           <a:bodyPr/>
           <a:lstStyle/>
@@ -3366,6 +3373,34 @@
             <a:r>
               <a:rPr/>
               <a:t>Part 3 What if? approximate counterfactuals with first differences</a:t>
+            </a:r>
+          </a:p>
+        </p:txBody>
+      </p:sp>
+      <p:sp>
+        <p:nvSpPr>
+          <p:cNvPr id="4" name="Text Placeholder 3"/>
+          <p:cNvSpPr>
+            <a:spLocks noGrp="1"/>
+          </p:cNvSpPr>
+          <p:nvPr>
+            <p:ph idx="2" sz="half" type="body"/>
+          </p:nvPr>
+        </p:nvSpPr>
+        <p:spPr/>
+        <p:txBody>
+          <a:bodyPr/>
+          <a:lstStyle/>
+          <a:p>
+            <a:pPr lvl="0" indent="0" marL="0">
+              <a:spcBef>
+                <a:spcPts val="3000"/>
+              </a:spcBef>
+              <a:buNone/>
+            </a:pPr>
+            <a:r>
+              <a:rPr b="1"/>
+              <a:t>Using First Differences allows one to remove time invariant unobservables and baselines and use changes in the neighbouring control wards as counterfactuals to what would have happened in Quays and Ancoats without the structural change. Robust to general UK trends such as immigration or Covid by exploiting within ward variation over time.Gap between group means can be interpreted as a simple DiD estimate for a particular period.</a:t>
             </a:r>
           </a:p>
         </p:txBody>
@@ -3386,8 +3421,8 @@
         </p:blipFill>
         <p:spPr bwMode="auto">
           <a:xfrm>
-            <a:off x="1181100" y="1193800"/>
-            <a:ext cx="6781800" cy="3390900"/>
+            <a:off x="3568700" y="1117600"/>
+            <a:ext cx="5105400" cy="2552700"/>
           </a:xfrm>
           <a:prstGeom prst="rect">
             <a:avLst/>
@@ -3632,7 +3667,59 @@
       </p:grpSpPr>
       <p:pic>
         <p:nvPicPr>
-          <p:cNvPr descr="presentation_files/figure-pptx/unnamed-chunk-14-2.png" id="0" name="Picture 1"/>
+          <p:cNvPr descr="presentation_files/figure-pptx/unnamed-chunk-15-1.png" id="0" name="Picture 1"/>
+          <p:cNvPicPr>
+            <a:picLocks noGrp="1" noChangeAspect="1"/>
+          </p:cNvPicPr>
+          <p:nvPr/>
+        </p:nvPicPr>
+        <p:blipFill>
+          <a:blip r:embed="rId2"/>
+          <a:stretch>
+            <a:fillRect/>
+          </a:stretch>
+        </p:blipFill>
+        <p:spPr bwMode="auto">
+          <a:xfrm>
+            <a:off x="1181100" y="1193800"/>
+            <a:ext cx="6781800" cy="3390900"/>
+          </a:xfrm>
+          <a:prstGeom prst="rect">
+            <a:avLst/>
+          </a:prstGeom>
+          <a:noFill/>
+          <a:ln w="9525">
+            <a:noFill/>
+            <a:headEnd/>
+            <a:tailEnd/>
+          </a:ln>
+        </p:spPr>
+      </p:pic>
+    </p:spTree>
+  </p:cSld>
+</p:sld>
+</file>
+
+<file path=ppt/slides/slide19.xml><?xml version="1.0" encoding="utf-8"?>
+<p:sld xmlns:a="http://schemas.openxmlformats.org/drawingml/2006/main" xmlns:r="http://schemas.openxmlformats.org/officeDocument/2006/relationships" xmlns:p="http://schemas.openxmlformats.org/presentationml/2006/main">
+  <p:cSld>
+    <p:spTree>
+      <p:nvGrpSpPr>
+        <p:cNvPr id="1" name=""/>
+        <p:cNvGrpSpPr/>
+        <p:nvPr/>
+      </p:nvGrpSpPr>
+      <p:grpSpPr>
+        <a:xfrm>
+          <a:off x="0" y="0"/>
+          <a:ext cx="0" cy="0"/>
+          <a:chOff x="0" y="0"/>
+          <a:chExt cx="0" cy="0"/>
+        </a:xfrm>
+      </p:grpSpPr>
+      <p:pic>
+        <p:nvPicPr>
+          <p:cNvPr descr="presentation_files/figure-pptx/unnamed-chunk-15-2.png" id="0" name="Picture 1"/>
           <p:cNvPicPr>
             <a:picLocks noGrp="1" noChangeAspect="1"/>
           </p:cNvPicPr>
@@ -3725,6 +3812,56 @@
             <a:r>
               <a:rPr/>
               <a:t> To live in a neighbourhood being gentrified is to experience rent rises, the destruction of community and ultimately displacement. Yet it is often something that is difficult to quantify and track.”The Greater Manchester Gentrification Index (Common Wealth)</a:t>
+            </a:r>
+          </a:p>
+        </p:txBody>
+      </p:sp>
+    </p:spTree>
+  </p:cSld>
+</p:sld>
+</file>
+
+<file path=ppt/slides/slide20.xml><?xml version="1.0" encoding="utf-8"?>
+<p:sld xmlns:a="http://schemas.openxmlformats.org/drawingml/2006/main" xmlns:r="http://schemas.openxmlformats.org/officeDocument/2006/relationships" xmlns:p="http://schemas.openxmlformats.org/presentationml/2006/main">
+  <p:cSld>
+    <p:spTree>
+      <p:nvGrpSpPr>
+        <p:cNvPr id="1" name=""/>
+        <p:cNvGrpSpPr/>
+        <p:nvPr/>
+      </p:nvGrpSpPr>
+      <p:grpSpPr>
+        <a:xfrm>
+          <a:off x="0" y="0"/>
+          <a:ext cx="0" cy="0"/>
+          <a:chOff x="0" y="0"/>
+          <a:chExt cx="0" cy="0"/>
+        </a:xfrm>
+      </p:grpSpPr>
+      <p:sp>
+        <p:nvSpPr>
+          <p:cNvPr id="3" name="Content Placeholder 2"/>
+          <p:cNvSpPr>
+            <a:spLocks noGrp="1"/>
+          </p:cNvSpPr>
+          <p:nvPr>
+            <p:ph idx="1"/>
+          </p:nvPr>
+        </p:nvSpPr>
+        <p:spPr/>
+        <p:txBody>
+          <a:bodyPr/>
+          <a:lstStyle/>
+          <a:p>
+            <a:pPr lvl="0" indent="0" marL="0">
+              <a:spcBef>
+                <a:spcPts val="3000"/>
+              </a:spcBef>
+              <a:buNone/>
+            </a:pPr>
+            <a:r>
+              <a:rPr b="1" baseline="-25000"/>
+              <a:t>Across indicators it seems that the 1991-2001 gap has been a pivotal moment of divergence between the two groups corresponding to both the services boom and regeneration efforts by the GMP and local councils.This notably slightly misalligns with the ball mapper results which instead separate out ancoats and quays from the rest of the pack around 2011-2021. This however seems largely driven by a drop in owner occupied housing proportion between 2000-2010s and a renting boom happening around the same time. Therefore something interesting is at play - an increase in highly educated worker share preceded a renting boom and a relative drop in owner occupied housing. Regeneration may have slightly preceded gentrification indeed the decrease in unemployment relative to its neighbors also happens in the 2001 census period.</a:t>
             </a:r>
           </a:p>
         </p:txBody>
